--- a/content/W01/D4/slides/C2_W01_D04_half2_STUDENT.pptx
+++ b/content/W01/D4/slides/C2_W01_D04_half2_STUDENT.pptx
@@ -4589,8 +4589,8 @@
         </p:blipFill>
         <p:spPr>
           <a:xfrm>
-            <a:off x="2072076" y="1627632"/>
-            <a:ext cx="1880088" cy="4425696"/>
+            <a:off x="5279459" y="1517904"/>
+            <a:ext cx="1632776" cy="3843528"/>
           </a:xfrm>
           <a:prstGeom prst="rect">
             <a:avLst/>
@@ -4605,8 +4605,8 @@
         </p:nvSpPr>
         <p:spPr>
           <a:xfrm>
-            <a:off x="5771244" y="2867152"/>
-            <a:ext cx="5734650" cy="1946656"/>
+            <a:off x="685800" y="5407152"/>
+            <a:ext cx="10820095" cy="646176"/>
           </a:xfrm>
           <a:prstGeom prst="rect">
             <a:avLst/>
@@ -4619,13 +4619,8 @@
           </a:bodyPr>
           <a:lstStyle/>
           <a:p>
-            <a:pPr>
-              <a:spcAft>
-                <a:spcPts val="900"/>
-              </a:spcAft>
-            </a:pPr>
-            <a:r>
-              <a:rPr sz="2000" b="0">
+            <a:r>
+              <a:rPr sz="1500" b="0">
                 <a:solidFill>
                   <a:srgbClr val="1C1C1A"/>
                 </a:solidFill>
@@ -10411,8 +10406,8 @@
         </p:blipFill>
         <p:spPr>
           <a:xfrm>
-            <a:off x="3215004" y="1627632"/>
-            <a:ext cx="5761685" cy="2424175"/>
+            <a:off x="2965074" y="1517904"/>
+            <a:ext cx="6261547" cy="2634488"/>
           </a:xfrm>
           <a:prstGeom prst="rect">
             <a:avLst/>
@@ -10427,8 +10422,8 @@
         </p:nvSpPr>
         <p:spPr>
           <a:xfrm>
-            <a:off x="685800" y="4161536"/>
-            <a:ext cx="10820095" cy="1891792"/>
+            <a:off x="685800" y="4198112"/>
+            <a:ext cx="10820095" cy="1855216"/>
           </a:xfrm>
           <a:prstGeom prst="rect">
             <a:avLst/>
@@ -18233,7 +18228,7 @@
           <p:nvPr/>
         </p:nvGraphicFramePr>
         <p:xfrm>
-          <a:off x="685800" y="2130552"/>
+          <a:off x="685800" y="1947671"/>
           <a:ext cx="10820094" cy="1865376"/>
         </p:xfrm>
         <a:graphic>
@@ -18243,8 +18238,8 @@
                 <a:tableStyleId>{2D5ABB26-0587-4C30-8999-92F81FD0307C}</a:tableStyleId>
               </a:tblPr>
               <a:tblGrid>
-                <a:gridCol w="5931067"/>
-                <a:gridCol w="4889027"/>
+                <a:gridCol w="5927276"/>
+                <a:gridCol w="4892818"/>
               </a:tblGrid>
               <a:tr h="310896">
                 <a:tc>
@@ -18542,8 +18537,8 @@
         </p:blipFill>
         <p:spPr>
           <a:xfrm>
-            <a:off x="4329742" y="4498848"/>
-            <a:ext cx="3532209" cy="1554480"/>
+            <a:off x="3914188" y="4133087"/>
+            <a:ext cx="4363317" cy="1920240"/>
           </a:xfrm>
           <a:prstGeom prst="rect">
             <a:avLst/>
